--- a/docs/CGIS_SMS_Scam_Detector_Presentation.pptx
+++ b/docs/CGIS_SMS_Scam_Detector_Presentation.pptx
@@ -19380,7 +19380,7 @@
               </a:defRPr>
             </a:pPr>
             <a:r>
-              <a:t>75%</a:t>
+              <a:t>96%</a:t>
             </a:r>
           </a:p>
         </p:txBody>
@@ -19533,7 +19533,7 @@
               </a:defRPr>
             </a:pPr>
             <a:r>
-              <a:t>72%</a:t>
+              <a:t>87%</a:t>
             </a:r>
           </a:p>
         </p:txBody>
@@ -19686,7 +19686,7 @@
               </a:defRPr>
             </a:pPr>
             <a:r>
-              <a:t>72%</a:t>
+              <a:t>87%</a:t>
             </a:r>
           </a:p>
         </p:txBody>
@@ -19839,7 +19839,7 @@
               </a:defRPr>
             </a:pPr>
             <a:r>
-              <a:t>72%</a:t>
+              <a:t>87%</a:t>
             </a:r>
           </a:p>
         </p:txBody>
